--- a/p04/A-frame-moving-geometric-objects.pptx
+++ b/p04/A-frame-moving-geometric-objects.pptx
@@ -5,7 +5,7 @@
     <p:sldMasterId id="2147483660" r:id="rId1"/>
   </p:sldMasterIdLst>
   <p:notesMasterIdLst>
-    <p:notesMasterId r:id="rId19"/>
+    <p:notesMasterId r:id="rId21"/>
   </p:notesMasterIdLst>
   <p:sldIdLst>
     <p:sldId id="297" r:id="rId2"/>
@@ -20,11 +20,13 @@
     <p:sldId id="298" r:id="rId11"/>
     <p:sldId id="286" r:id="rId12"/>
     <p:sldId id="295" r:id="rId13"/>
-    <p:sldId id="288" r:id="rId14"/>
-    <p:sldId id="287" r:id="rId15"/>
-    <p:sldId id="299" r:id="rId16"/>
-    <p:sldId id="284" r:id="rId17"/>
-    <p:sldId id="293" r:id="rId18"/>
+    <p:sldId id="301" r:id="rId14"/>
+    <p:sldId id="302" r:id="rId15"/>
+    <p:sldId id="288" r:id="rId16"/>
+    <p:sldId id="287" r:id="rId17"/>
+    <p:sldId id="299" r:id="rId18"/>
+    <p:sldId id="284" r:id="rId19"/>
+    <p:sldId id="293" r:id="rId20"/>
   </p:sldIdLst>
   <p:sldSz cx="12192000" cy="6858000"/>
   <p:notesSz cx="7019925" cy="9305925"/>
@@ -221,7 +223,7 @@
           <a:p>
             <a:fld id="{FA1E3CD0-6E24-4AC0-945A-82AEC1490673}" type="datetimeFigureOut">
               <a:rPr lang="en-US" smtClean="0"/>
-              <a:t>10/24/2025</a:t>
+              <a:t>10/30/2025</a:t>
             </a:fld>
             <a:endParaRPr lang="en-US"/>
           </a:p>
@@ -703,7 +705,7 @@
           <a:p>
             <a:fld id="{846CE7D5-CF57-46EF-B807-FDD0502418D4}" type="datetimeFigureOut">
               <a:rPr lang="en-US" smtClean="0"/>
-              <a:t>10/24/2025</a:t>
+              <a:t>10/30/2025</a:t>
             </a:fld>
             <a:endParaRPr lang="en-US"/>
           </a:p>
@@ -873,7 +875,7 @@
           <a:p>
             <a:fld id="{846CE7D5-CF57-46EF-B807-FDD0502418D4}" type="datetimeFigureOut">
               <a:rPr lang="en-US" smtClean="0"/>
-              <a:t>10/24/2025</a:t>
+              <a:t>10/30/2025</a:t>
             </a:fld>
             <a:endParaRPr lang="en-US"/>
           </a:p>
@@ -1053,7 +1055,7 @@
           <a:p>
             <a:fld id="{846CE7D5-CF57-46EF-B807-FDD0502418D4}" type="datetimeFigureOut">
               <a:rPr lang="en-US" smtClean="0"/>
-              <a:t>10/24/2025</a:t>
+              <a:t>10/30/2025</a:t>
             </a:fld>
             <a:endParaRPr lang="en-US"/>
           </a:p>
@@ -1223,7 +1225,7 @@
           <a:p>
             <a:fld id="{846CE7D5-CF57-46EF-B807-FDD0502418D4}" type="datetimeFigureOut">
               <a:rPr lang="en-US" smtClean="0"/>
-              <a:t>10/24/2025</a:t>
+              <a:t>10/30/2025</a:t>
             </a:fld>
             <a:endParaRPr lang="en-US"/>
           </a:p>
@@ -1469,7 +1471,7 @@
           <a:p>
             <a:fld id="{846CE7D5-CF57-46EF-B807-FDD0502418D4}" type="datetimeFigureOut">
               <a:rPr lang="en-US" smtClean="0"/>
-              <a:t>10/24/2025</a:t>
+              <a:t>10/30/2025</a:t>
             </a:fld>
             <a:endParaRPr lang="en-US"/>
           </a:p>
@@ -1701,7 +1703,7 @@
           <a:p>
             <a:fld id="{846CE7D5-CF57-46EF-B807-FDD0502418D4}" type="datetimeFigureOut">
               <a:rPr lang="en-US" smtClean="0"/>
-              <a:t>10/24/2025</a:t>
+              <a:t>10/30/2025</a:t>
             </a:fld>
             <a:endParaRPr lang="en-US"/>
           </a:p>
@@ -2068,7 +2070,7 @@
           <a:p>
             <a:fld id="{846CE7D5-CF57-46EF-B807-FDD0502418D4}" type="datetimeFigureOut">
               <a:rPr lang="en-US" smtClean="0"/>
-              <a:t>10/24/2025</a:t>
+              <a:t>10/30/2025</a:t>
             </a:fld>
             <a:endParaRPr lang="en-US"/>
           </a:p>
@@ -2186,7 +2188,7 @@
           <a:p>
             <a:fld id="{846CE7D5-CF57-46EF-B807-FDD0502418D4}" type="datetimeFigureOut">
               <a:rPr lang="en-US" smtClean="0"/>
-              <a:t>10/24/2025</a:t>
+              <a:t>10/30/2025</a:t>
             </a:fld>
             <a:endParaRPr lang="en-US"/>
           </a:p>
@@ -2281,7 +2283,7 @@
           <a:p>
             <a:fld id="{846CE7D5-CF57-46EF-B807-FDD0502418D4}" type="datetimeFigureOut">
               <a:rPr lang="en-US" smtClean="0"/>
-              <a:t>10/24/2025</a:t>
+              <a:t>10/30/2025</a:t>
             </a:fld>
             <a:endParaRPr lang="en-US"/>
           </a:p>
@@ -2558,7 +2560,7 @@
           <a:p>
             <a:fld id="{846CE7D5-CF57-46EF-B807-FDD0502418D4}" type="datetimeFigureOut">
               <a:rPr lang="en-US" smtClean="0"/>
-              <a:t>10/24/2025</a:t>
+              <a:t>10/30/2025</a:t>
             </a:fld>
             <a:endParaRPr lang="en-US"/>
           </a:p>
@@ -2815,7 +2817,7 @@
           <a:p>
             <a:fld id="{846CE7D5-CF57-46EF-B807-FDD0502418D4}" type="datetimeFigureOut">
               <a:rPr lang="en-US" smtClean="0"/>
-              <a:t>10/24/2025</a:t>
+              <a:t>10/30/2025</a:t>
             </a:fld>
             <a:endParaRPr lang="en-US"/>
           </a:p>
@@ -3028,7 +3030,7 @@
           <a:p>
             <a:fld id="{846CE7D5-CF57-46EF-B807-FDD0502418D4}" type="datetimeFigureOut">
               <a:rPr lang="en-US" smtClean="0"/>
-              <a:t>10/24/2025</a:t>
+              <a:t>10/30/2025</a:t>
             </a:fld>
             <a:endParaRPr lang="en-US"/>
           </a:p>
@@ -5646,7 +5648,7 @@
                   <a:srgbClr val="FF0000"/>
                 </a:solidFill>
               </a:rPr>
-              <a:t>position…</a:t>
+              <a:t>position, color,…</a:t>
             </a:r>
           </a:p>
           <a:p>
@@ -5945,6 +5947,1647 @@
           <p:cNvPr id="2" name="Title 1">
             <a:extLst>
               <a:ext uri="{FF2B5EF4-FFF2-40B4-BE49-F238E27FC236}">
+                <a16:creationId xmlns:a16="http://schemas.microsoft.com/office/drawing/2014/main" id="{A3C4F0A1-01D0-AEB2-54B8-AB60F36A8D43}"/>
+              </a:ext>
+            </a:extLst>
+          </p:cNvPr>
+          <p:cNvSpPr>
+            <a:spLocks noGrp="1"/>
+          </p:cNvSpPr>
+          <p:nvPr>
+            <p:ph type="title"/>
+          </p:nvPr>
+        </p:nvSpPr>
+        <p:spPr/>
+        <p:txBody>
+          <a:bodyPr/>
+          <a:lstStyle/>
+          <a:p>
+            <a:r>
+              <a:rPr lang="en-US" dirty="0"/>
+              <a:t>Cube in a sphere</a:t>
+            </a:r>
+          </a:p>
+        </p:txBody>
+      </p:sp>
+      <p:sp>
+        <p:nvSpPr>
+          <p:cNvPr id="4" name="Rectangle 3">
+            <a:extLst>
+              <a:ext uri="{FF2B5EF4-FFF2-40B4-BE49-F238E27FC236}">
+                <a16:creationId xmlns:a16="http://schemas.microsoft.com/office/drawing/2014/main" id="{AA326B21-D616-895A-5795-596CB170EA33}"/>
+              </a:ext>
+            </a:extLst>
+          </p:cNvPr>
+          <p:cNvSpPr/>
+          <p:nvPr/>
+        </p:nvSpPr>
+        <p:spPr>
+          <a:xfrm>
+            <a:off x="5534070" y="3376996"/>
+            <a:ext cx="2010813" cy="1945808"/>
+          </a:xfrm>
+          <a:prstGeom prst="rect">
+            <a:avLst/>
+          </a:prstGeom>
+        </p:spPr>
+        <p:style>
+          <a:lnRef idx="2">
+            <a:schemeClr val="accent5"/>
+          </a:lnRef>
+          <a:fillRef idx="1">
+            <a:schemeClr val="lt1"/>
+          </a:fillRef>
+          <a:effectRef idx="0">
+            <a:schemeClr val="accent5"/>
+          </a:effectRef>
+          <a:fontRef idx="minor">
+            <a:schemeClr val="dk1"/>
+          </a:fontRef>
+        </p:style>
+        <p:txBody>
+          <a:bodyPr rtlCol="0" anchor="ctr"/>
+          <a:lstStyle/>
+          <a:p>
+            <a:pPr algn="ctr"/>
+            <a:endParaRPr lang="en-US"/>
+          </a:p>
+        </p:txBody>
+      </p:sp>
+      <p:sp>
+        <p:nvSpPr>
+          <p:cNvPr id="5" name="Rectangle 4">
+            <a:extLst>
+              <a:ext uri="{FF2B5EF4-FFF2-40B4-BE49-F238E27FC236}">
+                <a16:creationId xmlns:a16="http://schemas.microsoft.com/office/drawing/2014/main" id="{3248FC43-25D7-D06D-D0B4-721F6AA52E70}"/>
+              </a:ext>
+            </a:extLst>
+          </p:cNvPr>
+          <p:cNvSpPr/>
+          <p:nvPr/>
+        </p:nvSpPr>
+        <p:spPr>
+          <a:xfrm>
+            <a:off x="6002826" y="2026341"/>
+            <a:ext cx="2010813" cy="1945808"/>
+          </a:xfrm>
+          <a:prstGeom prst="rect">
+            <a:avLst/>
+          </a:prstGeom>
+          <a:noFill/>
+        </p:spPr>
+        <p:style>
+          <a:lnRef idx="2">
+            <a:schemeClr val="accent5"/>
+          </a:lnRef>
+          <a:fillRef idx="1">
+            <a:schemeClr val="lt1"/>
+          </a:fillRef>
+          <a:effectRef idx="0">
+            <a:schemeClr val="accent5"/>
+          </a:effectRef>
+          <a:fontRef idx="minor">
+            <a:schemeClr val="dk1"/>
+          </a:fontRef>
+        </p:style>
+        <p:txBody>
+          <a:bodyPr rtlCol="0" anchor="ctr"/>
+          <a:lstStyle/>
+          <a:p>
+            <a:pPr algn="ctr"/>
+            <a:endParaRPr lang="en-US"/>
+          </a:p>
+        </p:txBody>
+      </p:sp>
+      <p:cxnSp>
+        <p:nvCxnSpPr>
+          <p:cNvPr id="7" name="Straight Connector 6">
+            <a:extLst>
+              <a:ext uri="{FF2B5EF4-FFF2-40B4-BE49-F238E27FC236}">
+                <a16:creationId xmlns:a16="http://schemas.microsoft.com/office/drawing/2014/main" id="{AEF980C1-8CE3-71B5-2481-847FE36E1779}"/>
+              </a:ext>
+            </a:extLst>
+          </p:cNvPr>
+          <p:cNvCxnSpPr>
+            <a:cxnSpLocks/>
+          </p:cNvCxnSpPr>
+          <p:nvPr/>
+        </p:nvCxnSpPr>
+        <p:spPr>
+          <a:xfrm flipV="1">
+            <a:off x="5560072" y="2026341"/>
+            <a:ext cx="2453567" cy="3279128"/>
+          </a:xfrm>
+          <a:prstGeom prst="line">
+            <a:avLst/>
+          </a:prstGeom>
+          <a:ln w="38100">
+            <a:solidFill>
+              <a:srgbClr val="FF0000"/>
+            </a:solidFill>
+          </a:ln>
+        </p:spPr>
+        <p:style>
+          <a:lnRef idx="1">
+            <a:schemeClr val="accent1"/>
+          </a:lnRef>
+          <a:fillRef idx="0">
+            <a:schemeClr val="accent1"/>
+          </a:fillRef>
+          <a:effectRef idx="0">
+            <a:schemeClr val="accent1"/>
+          </a:effectRef>
+          <a:fontRef idx="minor">
+            <a:schemeClr val="tx1"/>
+          </a:fontRef>
+        </p:style>
+      </p:cxnSp>
+      <p:sp>
+        <p:nvSpPr>
+          <p:cNvPr id="10" name="Cube 9">
+            <a:extLst>
+              <a:ext uri="{FF2B5EF4-FFF2-40B4-BE49-F238E27FC236}">
+                <a16:creationId xmlns:a16="http://schemas.microsoft.com/office/drawing/2014/main" id="{34BB89B5-6704-A0E8-CFC0-CF36FEA8AC70}"/>
+              </a:ext>
+            </a:extLst>
+          </p:cNvPr>
+          <p:cNvSpPr/>
+          <p:nvPr/>
+        </p:nvSpPr>
+        <p:spPr>
+          <a:xfrm>
+            <a:off x="1252424" y="2826622"/>
+            <a:ext cx="1538445" cy="1607784"/>
+          </a:xfrm>
+          <a:prstGeom prst="cube">
+            <a:avLst/>
+          </a:prstGeom>
+        </p:spPr>
+        <p:style>
+          <a:lnRef idx="2">
+            <a:schemeClr val="accent1">
+              <a:shade val="15000"/>
+            </a:schemeClr>
+          </a:lnRef>
+          <a:fillRef idx="1">
+            <a:schemeClr val="accent1"/>
+          </a:fillRef>
+          <a:effectRef idx="0">
+            <a:schemeClr val="accent1"/>
+          </a:effectRef>
+          <a:fontRef idx="minor">
+            <a:schemeClr val="lt1"/>
+          </a:fontRef>
+        </p:style>
+        <p:txBody>
+          <a:bodyPr rtlCol="0" anchor="ctr"/>
+          <a:lstStyle/>
+          <a:p>
+            <a:pPr algn="ctr"/>
+            <a:endParaRPr lang="en-US"/>
+          </a:p>
+        </p:txBody>
+      </p:sp>
+      <p:sp>
+        <p:nvSpPr>
+          <p:cNvPr id="11" name="Arrow: Right 10">
+            <a:extLst>
+              <a:ext uri="{FF2B5EF4-FFF2-40B4-BE49-F238E27FC236}">
+                <a16:creationId xmlns:a16="http://schemas.microsoft.com/office/drawing/2014/main" id="{DB459F44-BD92-093D-59CF-F75F6D8E4C57}"/>
+              </a:ext>
+            </a:extLst>
+          </p:cNvPr>
+          <p:cNvSpPr/>
+          <p:nvPr/>
+        </p:nvSpPr>
+        <p:spPr>
+          <a:xfrm>
+            <a:off x="3677100" y="3276239"/>
+            <a:ext cx="996740" cy="550374"/>
+          </a:xfrm>
+          <a:prstGeom prst="rightArrow">
+            <a:avLst/>
+          </a:prstGeom>
+        </p:spPr>
+        <p:style>
+          <a:lnRef idx="2">
+            <a:schemeClr val="dk1">
+              <a:shade val="15000"/>
+            </a:schemeClr>
+          </a:lnRef>
+          <a:fillRef idx="1">
+            <a:schemeClr val="dk1"/>
+          </a:fillRef>
+          <a:effectRef idx="0">
+            <a:schemeClr val="dk1"/>
+          </a:effectRef>
+          <a:fontRef idx="minor">
+            <a:schemeClr val="lt1"/>
+          </a:fontRef>
+        </p:style>
+        <p:txBody>
+          <a:bodyPr rtlCol="0" anchor="ctr"/>
+          <a:lstStyle/>
+          <a:p>
+            <a:pPr algn="ctr"/>
+            <a:endParaRPr lang="en-US"/>
+          </a:p>
+        </p:txBody>
+      </p:sp>
+      <p:sp>
+        <p:nvSpPr>
+          <p:cNvPr id="12" name="TextBox 11">
+            <a:extLst>
+              <a:ext uri="{FF2B5EF4-FFF2-40B4-BE49-F238E27FC236}">
+                <a16:creationId xmlns:a16="http://schemas.microsoft.com/office/drawing/2014/main" id="{21F6A7E0-7914-46EC-84D7-9D8878507E34}"/>
+              </a:ext>
+            </a:extLst>
+          </p:cNvPr>
+          <p:cNvSpPr txBox="1"/>
+          <p:nvPr/>
+        </p:nvSpPr>
+        <p:spPr>
+          <a:xfrm>
+            <a:off x="4769429" y="5305469"/>
+            <a:ext cx="1015021" cy="584775"/>
+          </a:xfrm>
+          <a:prstGeom prst="rect">
+            <a:avLst/>
+          </a:prstGeom>
+          <a:noFill/>
+        </p:spPr>
+        <p:txBody>
+          <a:bodyPr wrap="none" rtlCol="0">
+            <a:spAutoFit/>
+          </a:bodyPr>
+          <a:lstStyle/>
+          <a:p>
+            <a:r>
+              <a:rPr lang="en-US" sz="3200" dirty="0"/>
+              <a:t>0,0,0</a:t>
+            </a:r>
+          </a:p>
+        </p:txBody>
+      </p:sp>
+      <mc:AlternateContent xmlns:mc="http://schemas.openxmlformats.org/markup-compatibility/2006">
+        <mc:Choice xmlns:a14="http://schemas.microsoft.com/office/drawing/2010/main" Requires="a14">
+          <p:sp>
+            <p:nvSpPr>
+              <p:cNvPr id="13" name="TextBox 12">
+                <a:extLst>
+                  <a:ext uri="{FF2B5EF4-FFF2-40B4-BE49-F238E27FC236}">
+                    <a16:creationId xmlns:a16="http://schemas.microsoft.com/office/drawing/2014/main" id="{97FA274E-093D-45CA-4F17-59C0CD400D5C}"/>
+                  </a:ext>
+                </a:extLst>
+              </p:cNvPr>
+              <p:cNvSpPr txBox="1"/>
+              <p:nvPr/>
+            </p:nvSpPr>
+            <p:spPr>
+              <a:xfrm>
+                <a:off x="7825375" y="1406968"/>
+                <a:ext cx="1253613" cy="584775"/>
+              </a:xfrm>
+              <a:prstGeom prst="rect">
+                <a:avLst/>
+              </a:prstGeom>
+              <a:noFill/>
+            </p:spPr>
+            <p:txBody>
+              <a:bodyPr wrap="none" rtlCol="0">
+                <a:spAutoFit/>
+              </a:bodyPr>
+              <a:lstStyle/>
+              <a:p>
+                <a14:m>
+                  <m:oMathPara xmlns:m="http://schemas.openxmlformats.org/officeDocument/2006/math">
+                    <m:oMathParaPr>
+                      <m:jc m:val="centerGroup"/>
+                    </m:oMathParaPr>
+                    <m:oMath xmlns:m="http://schemas.openxmlformats.org/officeDocument/2006/math">
+                      <m:r>
+                        <a:rPr lang="en-US" sz="3200" i="1" dirty="0" smtClean="0">
+                          <a:latin typeface="Cambria Math" panose="02040503050406030204" pitchFamily="18" charset="0"/>
+                        </a:rPr>
+                        <m:t>𝑥</m:t>
+                      </m:r>
+                      <m:r>
+                        <a:rPr lang="en-US" sz="3200" i="1" dirty="0" err="1" smtClean="0">
+                          <a:latin typeface="Cambria Math" panose="02040503050406030204" pitchFamily="18" charset="0"/>
+                        </a:rPr>
+                        <m:t>,</m:t>
+                      </m:r>
+                      <m:r>
+                        <a:rPr lang="en-US" sz="3200" i="1" dirty="0" err="1">
+                          <a:latin typeface="Cambria Math" panose="02040503050406030204" pitchFamily="18" charset="0"/>
+                        </a:rPr>
+                        <m:t>𝑦</m:t>
+                      </m:r>
+                      <m:r>
+                        <a:rPr lang="en-US" sz="3200" i="1" dirty="0" err="1" smtClean="0">
+                          <a:latin typeface="Cambria Math" panose="02040503050406030204" pitchFamily="18" charset="0"/>
+                        </a:rPr>
+                        <m:t>,</m:t>
+                      </m:r>
+                      <m:r>
+                        <a:rPr lang="en-US" sz="3200" i="1" dirty="0" err="1">
+                          <a:latin typeface="Cambria Math" panose="02040503050406030204" pitchFamily="18" charset="0"/>
+                        </a:rPr>
+                        <m:t>𝑧</m:t>
+                      </m:r>
+                    </m:oMath>
+                  </m:oMathPara>
+                </a14:m>
+              </a:p>
+            </p:txBody>
+          </p:sp>
+        </mc:Choice>
+        <mc:Fallback>
+          <p:sp>
+            <p:nvSpPr>
+              <p:cNvPr id="13" name="TextBox 12">
+                <a:extLst>
+                  <a:ext uri="{FF2B5EF4-FFF2-40B4-BE49-F238E27FC236}">
+                    <a16:creationId xmlns:a16="http://schemas.microsoft.com/office/drawing/2014/main" id="{97FA274E-093D-45CA-4F17-59C0CD400D5C}"/>
+                  </a:ext>
+                </a:extLst>
+              </p:cNvPr>
+              <p:cNvSpPr txBox="1">
+                <a:spLocks noRot="1" noChangeAspect="1" noMove="1" noResize="1" noEditPoints="1" noAdjustHandles="1" noChangeArrowheads="1" noChangeShapeType="1" noTextEdit="1"/>
+              </p:cNvSpPr>
+              <p:nvPr/>
+            </p:nvSpPr>
+            <p:spPr>
+              <a:xfrm>
+                <a:off x="7825375" y="1406968"/>
+                <a:ext cx="1253613" cy="584775"/>
+              </a:xfrm>
+              <a:prstGeom prst="rect">
+                <a:avLst/>
+              </a:prstGeom>
+              <a:blipFill>
+                <a:blip r:embed="rId2"/>
+                <a:stretch>
+                  <a:fillRect/>
+                </a:stretch>
+              </a:blipFill>
+            </p:spPr>
+            <p:txBody>
+              <a:bodyPr/>
+              <a:lstStyle/>
+              <a:p>
+                <a:r>
+                  <a:rPr lang="en-US">
+                    <a:noFill/>
+                  </a:rPr>
+                  <a:t> </a:t>
+                </a:r>
+              </a:p>
+            </p:txBody>
+          </p:sp>
+        </mc:Fallback>
+      </mc:AlternateContent>
+      <mc:AlternateContent xmlns:mc="http://schemas.openxmlformats.org/markup-compatibility/2006">
+        <mc:Choice xmlns:a14="http://schemas.microsoft.com/office/drawing/2010/main" Requires="a14">
+          <p:sp>
+            <p:nvSpPr>
+              <p:cNvPr id="14" name="TextBox 13">
+                <a:extLst>
+                  <a:ext uri="{FF2B5EF4-FFF2-40B4-BE49-F238E27FC236}">
+                    <a16:creationId xmlns:a16="http://schemas.microsoft.com/office/drawing/2014/main" id="{E766F00A-17FE-19BC-ADCD-38C5377AF01E}"/>
+                  </a:ext>
+                </a:extLst>
+              </p:cNvPr>
+              <p:cNvSpPr txBox="1"/>
+              <p:nvPr/>
+            </p:nvSpPr>
+            <p:spPr>
+              <a:xfrm>
+                <a:off x="6945228" y="2352914"/>
+                <a:ext cx="568041" cy="646331"/>
+              </a:xfrm>
+              <a:prstGeom prst="rect">
+                <a:avLst/>
+              </a:prstGeom>
+              <a:noFill/>
+            </p:spPr>
+            <p:txBody>
+              <a:bodyPr wrap="none" rtlCol="0">
+                <a:spAutoFit/>
+              </a:bodyPr>
+              <a:lstStyle/>
+              <a:p>
+                <a14:m>
+                  <m:oMathPara xmlns:m="http://schemas.openxmlformats.org/officeDocument/2006/math">
+                    <m:oMathParaPr>
+                      <m:jc m:val="centerGroup"/>
+                    </m:oMathParaPr>
+                    <m:oMath xmlns:m="http://schemas.openxmlformats.org/officeDocument/2006/math">
+                      <m:r>
+                        <a:rPr lang="en-US" sz="3600" i="1" dirty="0" smtClean="0">
+                          <a:latin typeface="Cambria Math" panose="02040503050406030204" pitchFamily="18" charset="0"/>
+                        </a:rPr>
+                        <m:t>𝑑</m:t>
+                      </m:r>
+                    </m:oMath>
+                  </m:oMathPara>
+                </a14:m>
+              </a:p>
+            </p:txBody>
+          </p:sp>
+        </mc:Choice>
+        <mc:Fallback>
+          <p:sp>
+            <p:nvSpPr>
+              <p:cNvPr id="14" name="TextBox 13">
+                <a:extLst>
+                  <a:ext uri="{FF2B5EF4-FFF2-40B4-BE49-F238E27FC236}">
+                    <a16:creationId xmlns:a16="http://schemas.microsoft.com/office/drawing/2014/main" id="{E766F00A-17FE-19BC-ADCD-38C5377AF01E}"/>
+                  </a:ext>
+                </a:extLst>
+              </p:cNvPr>
+              <p:cNvSpPr txBox="1">
+                <a:spLocks noRot="1" noChangeAspect="1" noMove="1" noResize="1" noEditPoints="1" noAdjustHandles="1" noChangeArrowheads="1" noChangeShapeType="1" noTextEdit="1"/>
+              </p:cNvSpPr>
+              <p:nvPr/>
+            </p:nvSpPr>
+            <p:spPr>
+              <a:xfrm>
+                <a:off x="6945228" y="2352914"/>
+                <a:ext cx="568041" cy="646331"/>
+              </a:xfrm>
+              <a:prstGeom prst="rect">
+                <a:avLst/>
+              </a:prstGeom>
+              <a:blipFill>
+                <a:blip r:embed="rId3"/>
+                <a:stretch>
+                  <a:fillRect/>
+                </a:stretch>
+              </a:blipFill>
+            </p:spPr>
+            <p:txBody>
+              <a:bodyPr/>
+              <a:lstStyle/>
+              <a:p>
+                <a:r>
+                  <a:rPr lang="en-US">
+                    <a:noFill/>
+                  </a:rPr>
+                  <a:t> </a:t>
+                </a:r>
+              </a:p>
+            </p:txBody>
+          </p:sp>
+        </mc:Fallback>
+      </mc:AlternateContent>
+      <mc:AlternateContent xmlns:mc="http://schemas.openxmlformats.org/markup-compatibility/2006">
+        <mc:Choice xmlns:a14="http://schemas.microsoft.com/office/drawing/2010/main" Requires="a14">
+          <p:sp>
+            <p:nvSpPr>
+              <p:cNvPr id="15" name="TextBox 14">
+                <a:extLst>
+                  <a:ext uri="{FF2B5EF4-FFF2-40B4-BE49-F238E27FC236}">
+                    <a16:creationId xmlns:a16="http://schemas.microsoft.com/office/drawing/2014/main" id="{E6A92AA1-0F0C-E0F4-1574-91FC194D8FE7}"/>
+                  </a:ext>
+                </a:extLst>
+              </p:cNvPr>
+              <p:cNvSpPr txBox="1"/>
+              <p:nvPr/>
+            </p:nvSpPr>
+            <p:spPr>
+              <a:xfrm>
+                <a:off x="8543541" y="3432578"/>
+                <a:ext cx="3330976" cy="539571"/>
+              </a:xfrm>
+              <a:prstGeom prst="rect">
+                <a:avLst/>
+              </a:prstGeom>
+              <a:noFill/>
+            </p:spPr>
+            <p:txBody>
+              <a:bodyPr wrap="none" rtlCol="0">
+                <a:spAutoFit/>
+              </a:bodyPr>
+              <a:lstStyle/>
+              <a:p>
+                <a14:m>
+                  <m:oMathPara xmlns:m="http://schemas.openxmlformats.org/officeDocument/2006/math">
+                    <m:oMathParaPr>
+                      <m:jc m:val="centerGroup"/>
+                    </m:oMathParaPr>
+                    <m:oMath xmlns:m="http://schemas.openxmlformats.org/officeDocument/2006/math">
+                      <m:r>
+                        <a:rPr lang="en-US" sz="2400" b="0" i="1" smtClean="0">
+                          <a:latin typeface="Cambria Math" panose="02040503050406030204" pitchFamily="18" charset="0"/>
+                        </a:rPr>
+                        <m:t>𝑑</m:t>
+                      </m:r>
+                      <m:r>
+                        <a:rPr lang="en-US" sz="2400" b="0" i="1" smtClean="0">
+                          <a:latin typeface="Cambria Math" panose="02040503050406030204" pitchFamily="18" charset="0"/>
+                        </a:rPr>
+                        <m:t>=1=</m:t>
+                      </m:r>
+                      <m:rad>
+                        <m:radPr>
+                          <m:degHide m:val="on"/>
+                          <m:ctrlPr>
+                            <a:rPr lang="en-US" sz="2400" b="0" i="1" smtClean="0">
+                              <a:latin typeface="Cambria Math" panose="02040503050406030204" pitchFamily="18" charset="0"/>
+                            </a:rPr>
+                          </m:ctrlPr>
+                        </m:radPr>
+                        <m:deg/>
+                        <m:e>
+                          <m:sSup>
+                            <m:sSupPr>
+                              <m:ctrlPr>
+                                <a:rPr lang="en-US" sz="2400" b="0" i="1" smtClean="0">
+                                  <a:latin typeface="Cambria Math" panose="02040503050406030204" pitchFamily="18" charset="0"/>
+                                </a:rPr>
+                              </m:ctrlPr>
+                            </m:sSupPr>
+                            <m:e>
+                              <m:r>
+                                <a:rPr lang="en-US" sz="2400" b="0" i="1" smtClean="0">
+                                  <a:latin typeface="Cambria Math" panose="02040503050406030204" pitchFamily="18" charset="0"/>
+                                </a:rPr>
+                                <m:t>𝑥</m:t>
+                              </m:r>
+                            </m:e>
+                            <m:sup>
+                              <m:r>
+                                <a:rPr lang="en-US" sz="2400" b="0" i="1" smtClean="0">
+                                  <a:latin typeface="Cambria Math" panose="02040503050406030204" pitchFamily="18" charset="0"/>
+                                </a:rPr>
+                                <m:t>2</m:t>
+                              </m:r>
+                            </m:sup>
+                          </m:sSup>
+                          <m:r>
+                            <a:rPr lang="en-US" sz="2400" b="0" i="1" smtClean="0">
+                              <a:latin typeface="Cambria Math" panose="02040503050406030204" pitchFamily="18" charset="0"/>
+                            </a:rPr>
+                            <m:t>+</m:t>
+                          </m:r>
+                          <m:sSup>
+                            <m:sSupPr>
+                              <m:ctrlPr>
+                                <a:rPr lang="en-US" sz="2400" b="0" i="1" smtClean="0">
+                                  <a:latin typeface="Cambria Math" panose="02040503050406030204" pitchFamily="18" charset="0"/>
+                                </a:rPr>
+                              </m:ctrlPr>
+                            </m:sSupPr>
+                            <m:e>
+                              <m:r>
+                                <a:rPr lang="en-US" sz="2400" b="0" i="1" smtClean="0">
+                                  <a:latin typeface="Cambria Math" panose="02040503050406030204" pitchFamily="18" charset="0"/>
+                                </a:rPr>
+                                <m:t>𝑦</m:t>
+                              </m:r>
+                            </m:e>
+                            <m:sup>
+                              <m:r>
+                                <a:rPr lang="en-US" sz="2400" b="0" i="1" smtClean="0">
+                                  <a:latin typeface="Cambria Math" panose="02040503050406030204" pitchFamily="18" charset="0"/>
+                                </a:rPr>
+                                <m:t>2</m:t>
+                              </m:r>
+                            </m:sup>
+                          </m:sSup>
+                          <m:r>
+                            <a:rPr lang="en-US" sz="2400" b="0" i="1" smtClean="0">
+                              <a:latin typeface="Cambria Math" panose="02040503050406030204" pitchFamily="18" charset="0"/>
+                            </a:rPr>
+                            <m:t>+</m:t>
+                          </m:r>
+                          <m:sSup>
+                            <m:sSupPr>
+                              <m:ctrlPr>
+                                <a:rPr lang="en-US" sz="2400" b="0" i="1" smtClean="0">
+                                  <a:latin typeface="Cambria Math" panose="02040503050406030204" pitchFamily="18" charset="0"/>
+                                </a:rPr>
+                              </m:ctrlPr>
+                            </m:sSupPr>
+                            <m:e>
+                              <m:r>
+                                <a:rPr lang="en-US" sz="2400" b="0" i="1" smtClean="0">
+                                  <a:latin typeface="Cambria Math" panose="02040503050406030204" pitchFamily="18" charset="0"/>
+                                </a:rPr>
+                                <m:t>𝑧</m:t>
+                              </m:r>
+                            </m:e>
+                            <m:sup>
+                              <m:r>
+                                <a:rPr lang="en-US" sz="2400" b="0" i="1" smtClean="0">
+                                  <a:latin typeface="Cambria Math" panose="02040503050406030204" pitchFamily="18" charset="0"/>
+                                </a:rPr>
+                                <m:t>2</m:t>
+                              </m:r>
+                            </m:sup>
+                          </m:sSup>
+                        </m:e>
+                      </m:rad>
+                    </m:oMath>
+                  </m:oMathPara>
+                </a14:m>
+                <a:endParaRPr lang="en-US" dirty="0"/>
+              </a:p>
+            </p:txBody>
+          </p:sp>
+        </mc:Choice>
+        <mc:Fallback>
+          <p:sp>
+            <p:nvSpPr>
+              <p:cNvPr id="15" name="TextBox 14">
+                <a:extLst>
+                  <a:ext uri="{FF2B5EF4-FFF2-40B4-BE49-F238E27FC236}">
+                    <a16:creationId xmlns:a16="http://schemas.microsoft.com/office/drawing/2014/main" id="{E6A92AA1-0F0C-E0F4-1574-91FC194D8FE7}"/>
+                  </a:ext>
+                </a:extLst>
+              </p:cNvPr>
+              <p:cNvSpPr txBox="1">
+                <a:spLocks noRot="1" noChangeAspect="1" noMove="1" noResize="1" noEditPoints="1" noAdjustHandles="1" noChangeArrowheads="1" noChangeShapeType="1" noTextEdit="1"/>
+              </p:cNvSpPr>
+              <p:nvPr/>
+            </p:nvSpPr>
+            <p:spPr>
+              <a:xfrm>
+                <a:off x="8543541" y="3432578"/>
+                <a:ext cx="3330976" cy="539571"/>
+              </a:xfrm>
+              <a:prstGeom prst="rect">
+                <a:avLst/>
+              </a:prstGeom>
+              <a:blipFill>
+                <a:blip r:embed="rId4"/>
+                <a:stretch>
+                  <a:fillRect/>
+                </a:stretch>
+              </a:blipFill>
+            </p:spPr>
+            <p:txBody>
+              <a:bodyPr/>
+              <a:lstStyle/>
+              <a:p>
+                <a:r>
+                  <a:rPr lang="en-US">
+                    <a:noFill/>
+                  </a:rPr>
+                  <a:t> </a:t>
+                </a:r>
+              </a:p>
+            </p:txBody>
+          </p:sp>
+        </mc:Fallback>
+      </mc:AlternateContent>
+      <mc:AlternateContent xmlns:mc="http://schemas.openxmlformats.org/markup-compatibility/2006">
+        <mc:Choice xmlns:a14="http://schemas.microsoft.com/office/drawing/2010/main" Requires="a14">
+          <p:sp>
+            <p:nvSpPr>
+              <p:cNvPr id="16" name="TextBox 15">
+                <a:extLst>
+                  <a:ext uri="{FF2B5EF4-FFF2-40B4-BE49-F238E27FC236}">
+                    <a16:creationId xmlns:a16="http://schemas.microsoft.com/office/drawing/2014/main" id="{6F71B53F-40DC-9A11-79DE-08E2980C6F30}"/>
+                  </a:ext>
+                </a:extLst>
+              </p:cNvPr>
+              <p:cNvSpPr txBox="1"/>
+              <p:nvPr/>
+            </p:nvSpPr>
+            <p:spPr>
+              <a:xfrm>
+                <a:off x="9149055" y="4246976"/>
+                <a:ext cx="2330061" cy="855299"/>
+              </a:xfrm>
+              <a:prstGeom prst="rect">
+                <a:avLst/>
+              </a:prstGeom>
+              <a:noFill/>
+            </p:spPr>
+            <p:txBody>
+              <a:bodyPr wrap="none" rtlCol="0">
+                <a:spAutoFit/>
+              </a:bodyPr>
+              <a:lstStyle/>
+              <a:p>
+                <a14:m>
+                  <m:oMathPara xmlns:m="http://schemas.openxmlformats.org/officeDocument/2006/math">
+                    <m:oMathParaPr>
+                      <m:jc m:val="centerGroup"/>
+                    </m:oMathParaPr>
+                    <m:oMath xmlns:m="http://schemas.openxmlformats.org/officeDocument/2006/math">
+                      <m:r>
+                        <a:rPr lang="en-US" sz="2400" b="0" i="1" smtClean="0">
+                          <a:latin typeface="Cambria Math" panose="02040503050406030204" pitchFamily="18" charset="0"/>
+                        </a:rPr>
+                        <m:t>𝑥</m:t>
+                      </m:r>
+                      <m:r>
+                        <a:rPr lang="en-US" sz="2400" b="0" i="1" smtClean="0">
+                          <a:latin typeface="Cambria Math" panose="02040503050406030204" pitchFamily="18" charset="0"/>
+                        </a:rPr>
+                        <m:t>=</m:t>
+                      </m:r>
+                      <m:r>
+                        <a:rPr lang="en-US" sz="2400" b="0" i="1" smtClean="0">
+                          <a:latin typeface="Cambria Math" panose="02040503050406030204" pitchFamily="18" charset="0"/>
+                        </a:rPr>
+                        <m:t>𝑦</m:t>
+                      </m:r>
+                      <m:r>
+                        <a:rPr lang="en-US" sz="2400" b="0" i="1" smtClean="0">
+                          <a:latin typeface="Cambria Math" panose="02040503050406030204" pitchFamily="18" charset="0"/>
+                        </a:rPr>
+                        <m:t>=</m:t>
+                      </m:r>
+                      <m:r>
+                        <a:rPr lang="en-US" sz="2400" b="0" i="1" smtClean="0">
+                          <a:latin typeface="Cambria Math" panose="02040503050406030204" pitchFamily="18" charset="0"/>
+                        </a:rPr>
+                        <m:t>𝑧</m:t>
+                      </m:r>
+                      <m:r>
+                        <a:rPr lang="en-US" sz="2400" b="0" i="1" smtClean="0">
+                          <a:latin typeface="Cambria Math" panose="02040503050406030204" pitchFamily="18" charset="0"/>
+                        </a:rPr>
+                        <m:t>=</m:t>
+                      </m:r>
+                      <m:f>
+                        <m:fPr>
+                          <m:ctrlPr>
+                            <a:rPr lang="en-US" sz="2400" b="0" i="1" smtClean="0">
+                              <a:latin typeface="Cambria Math" panose="02040503050406030204" pitchFamily="18" charset="0"/>
+                            </a:rPr>
+                          </m:ctrlPr>
+                        </m:fPr>
+                        <m:num>
+                          <m:r>
+                            <a:rPr lang="en-US" sz="2400" b="0" i="1" smtClean="0">
+                              <a:latin typeface="Cambria Math" panose="02040503050406030204" pitchFamily="18" charset="0"/>
+                            </a:rPr>
+                            <m:t>1</m:t>
+                          </m:r>
+                        </m:num>
+                        <m:den>
+                          <m:rad>
+                            <m:radPr>
+                              <m:degHide m:val="on"/>
+                              <m:ctrlPr>
+                                <a:rPr lang="en-US" sz="2400" b="0" i="1" smtClean="0">
+                                  <a:latin typeface="Cambria Math" panose="02040503050406030204" pitchFamily="18" charset="0"/>
+                                </a:rPr>
+                              </m:ctrlPr>
+                            </m:radPr>
+                            <m:deg/>
+                            <m:e>
+                              <m:r>
+                                <a:rPr lang="en-US" sz="2400" b="0" i="1" smtClean="0">
+                                  <a:latin typeface="Cambria Math" panose="02040503050406030204" pitchFamily="18" charset="0"/>
+                                </a:rPr>
+                                <m:t>3</m:t>
+                              </m:r>
+                            </m:e>
+                          </m:rad>
+                        </m:den>
+                      </m:f>
+                    </m:oMath>
+                  </m:oMathPara>
+                </a14:m>
+                <a:endParaRPr lang="en-US" dirty="0"/>
+              </a:p>
+            </p:txBody>
+          </p:sp>
+        </mc:Choice>
+        <mc:Fallback>
+          <p:sp>
+            <p:nvSpPr>
+              <p:cNvPr id="16" name="TextBox 15">
+                <a:extLst>
+                  <a:ext uri="{FF2B5EF4-FFF2-40B4-BE49-F238E27FC236}">
+                    <a16:creationId xmlns:a16="http://schemas.microsoft.com/office/drawing/2014/main" id="{6F71B53F-40DC-9A11-79DE-08E2980C6F30}"/>
+                  </a:ext>
+                </a:extLst>
+              </p:cNvPr>
+              <p:cNvSpPr txBox="1">
+                <a:spLocks noRot="1" noChangeAspect="1" noMove="1" noResize="1" noEditPoints="1" noAdjustHandles="1" noChangeArrowheads="1" noChangeShapeType="1" noTextEdit="1"/>
+              </p:cNvSpPr>
+              <p:nvPr/>
+            </p:nvSpPr>
+            <p:spPr>
+              <a:xfrm>
+                <a:off x="9149055" y="4246976"/>
+                <a:ext cx="2330061" cy="855299"/>
+              </a:xfrm>
+              <a:prstGeom prst="rect">
+                <a:avLst/>
+              </a:prstGeom>
+              <a:blipFill>
+                <a:blip r:embed="rId5"/>
+                <a:stretch>
+                  <a:fillRect/>
+                </a:stretch>
+              </a:blipFill>
+            </p:spPr>
+            <p:txBody>
+              <a:bodyPr/>
+              <a:lstStyle/>
+              <a:p>
+                <a:r>
+                  <a:rPr lang="en-US">
+                    <a:noFill/>
+                  </a:rPr>
+                  <a:t> </a:t>
+                </a:r>
+              </a:p>
+            </p:txBody>
+          </p:sp>
+        </mc:Fallback>
+      </mc:AlternateContent>
+    </p:spTree>
+    <p:extLst>
+      <p:ext uri="{BB962C8B-B14F-4D97-AF65-F5344CB8AC3E}">
+        <p14:creationId xmlns:p14="http://schemas.microsoft.com/office/powerpoint/2010/main" val="3295523935"/>
+      </p:ext>
+    </p:extLst>
+  </p:cSld>
+  <p:clrMapOvr>
+    <a:masterClrMapping/>
+  </p:clrMapOvr>
+</p:sld>
+</file>
+
+<file path=ppt/slides/slide14.xml><?xml version="1.0" encoding="utf-8"?>
+<p:sld xmlns:a="http://schemas.openxmlformats.org/drawingml/2006/main" xmlns:r="http://schemas.openxmlformats.org/officeDocument/2006/relationships" xmlns:p="http://schemas.openxmlformats.org/presentationml/2006/main">
+  <p:cSld>
+    <p:spTree>
+      <p:nvGrpSpPr>
+        <p:cNvPr id="1" name="">
+          <a:extLst>
+            <a:ext uri="{FF2B5EF4-FFF2-40B4-BE49-F238E27FC236}">
+              <a16:creationId xmlns:a16="http://schemas.microsoft.com/office/drawing/2014/main" id="{49BB0549-5E88-6288-6DBD-8DBBE5746187}"/>
+            </a:ext>
+          </a:extLst>
+        </p:cNvPr>
+        <p:cNvGrpSpPr/>
+        <p:nvPr/>
+      </p:nvGrpSpPr>
+      <p:grpSpPr>
+        <a:xfrm>
+          <a:off x="0" y="0"/>
+          <a:ext cx="0" cy="0"/>
+          <a:chOff x="0" y="0"/>
+          <a:chExt cx="0" cy="0"/>
+        </a:xfrm>
+      </p:grpSpPr>
+      <p:sp>
+        <p:nvSpPr>
+          <p:cNvPr id="2" name="Title 1">
+            <a:extLst>
+              <a:ext uri="{FF2B5EF4-FFF2-40B4-BE49-F238E27FC236}">
+                <a16:creationId xmlns:a16="http://schemas.microsoft.com/office/drawing/2014/main" id="{7949253F-EE6A-BBDA-FF4D-BC070D169B13}"/>
+              </a:ext>
+            </a:extLst>
+          </p:cNvPr>
+          <p:cNvSpPr>
+            <a:spLocks noGrp="1"/>
+          </p:cNvSpPr>
+          <p:nvPr>
+            <p:ph type="title"/>
+          </p:nvPr>
+        </p:nvSpPr>
+        <p:spPr/>
+        <p:txBody>
+          <a:bodyPr/>
+          <a:lstStyle/>
+          <a:p>
+            <a:r>
+              <a:rPr lang="en-US" dirty="0"/>
+              <a:t>Cube in a sphere</a:t>
+            </a:r>
+          </a:p>
+        </p:txBody>
+      </p:sp>
+      <mc:AlternateContent xmlns:mc="http://schemas.openxmlformats.org/markup-compatibility/2006">
+        <mc:Choice xmlns:a14="http://schemas.microsoft.com/office/drawing/2010/main" Requires="a14">
+          <p:sp>
+            <p:nvSpPr>
+              <p:cNvPr id="15" name="TextBox 14">
+                <a:extLst>
+                  <a:ext uri="{FF2B5EF4-FFF2-40B4-BE49-F238E27FC236}">
+                    <a16:creationId xmlns:a16="http://schemas.microsoft.com/office/drawing/2014/main" id="{74E64987-EF2B-B667-EF53-C15FD00DAB24}"/>
+                  </a:ext>
+                </a:extLst>
+              </p:cNvPr>
+              <p:cNvSpPr txBox="1"/>
+              <p:nvPr/>
+            </p:nvSpPr>
+            <p:spPr>
+              <a:xfrm>
+                <a:off x="7278116" y="2295734"/>
+                <a:ext cx="3330976" cy="539571"/>
+              </a:xfrm>
+              <a:prstGeom prst="rect">
+                <a:avLst/>
+              </a:prstGeom>
+              <a:noFill/>
+            </p:spPr>
+            <p:txBody>
+              <a:bodyPr wrap="none" rtlCol="0">
+                <a:spAutoFit/>
+              </a:bodyPr>
+              <a:lstStyle/>
+              <a:p>
+                <a14:m>
+                  <m:oMathPara xmlns:m="http://schemas.openxmlformats.org/officeDocument/2006/math">
+                    <m:oMathParaPr>
+                      <m:jc m:val="centerGroup"/>
+                    </m:oMathParaPr>
+                    <m:oMath xmlns:m="http://schemas.openxmlformats.org/officeDocument/2006/math">
+                      <m:r>
+                        <a:rPr lang="en-US" sz="2400" b="0" i="1" smtClean="0">
+                          <a:latin typeface="Cambria Math" panose="02040503050406030204" pitchFamily="18" charset="0"/>
+                        </a:rPr>
+                        <m:t>𝑑</m:t>
+                      </m:r>
+                      <m:r>
+                        <a:rPr lang="en-US" sz="2400" b="0" i="1" smtClean="0">
+                          <a:latin typeface="Cambria Math" panose="02040503050406030204" pitchFamily="18" charset="0"/>
+                        </a:rPr>
+                        <m:t>=1=</m:t>
+                      </m:r>
+                      <m:rad>
+                        <m:radPr>
+                          <m:degHide m:val="on"/>
+                          <m:ctrlPr>
+                            <a:rPr lang="en-US" sz="2400" b="0" i="1" smtClean="0">
+                              <a:latin typeface="Cambria Math" panose="02040503050406030204" pitchFamily="18" charset="0"/>
+                            </a:rPr>
+                          </m:ctrlPr>
+                        </m:radPr>
+                        <m:deg/>
+                        <m:e>
+                          <m:sSup>
+                            <m:sSupPr>
+                              <m:ctrlPr>
+                                <a:rPr lang="en-US" sz="2400" b="0" i="1" smtClean="0">
+                                  <a:latin typeface="Cambria Math" panose="02040503050406030204" pitchFamily="18" charset="0"/>
+                                </a:rPr>
+                              </m:ctrlPr>
+                            </m:sSupPr>
+                            <m:e>
+                              <m:r>
+                                <a:rPr lang="en-US" sz="2400" b="0" i="1" smtClean="0">
+                                  <a:latin typeface="Cambria Math" panose="02040503050406030204" pitchFamily="18" charset="0"/>
+                                </a:rPr>
+                                <m:t>𝑥</m:t>
+                              </m:r>
+                            </m:e>
+                            <m:sup>
+                              <m:r>
+                                <a:rPr lang="en-US" sz="2400" b="0" i="1" smtClean="0">
+                                  <a:latin typeface="Cambria Math" panose="02040503050406030204" pitchFamily="18" charset="0"/>
+                                </a:rPr>
+                                <m:t>2</m:t>
+                              </m:r>
+                            </m:sup>
+                          </m:sSup>
+                          <m:r>
+                            <a:rPr lang="en-US" sz="2400" b="0" i="1" smtClean="0">
+                              <a:latin typeface="Cambria Math" panose="02040503050406030204" pitchFamily="18" charset="0"/>
+                            </a:rPr>
+                            <m:t>+</m:t>
+                          </m:r>
+                          <m:sSup>
+                            <m:sSupPr>
+                              <m:ctrlPr>
+                                <a:rPr lang="en-US" sz="2400" b="0" i="1" smtClean="0">
+                                  <a:latin typeface="Cambria Math" panose="02040503050406030204" pitchFamily="18" charset="0"/>
+                                </a:rPr>
+                              </m:ctrlPr>
+                            </m:sSupPr>
+                            <m:e>
+                              <m:r>
+                                <a:rPr lang="en-US" sz="2400" b="0" i="1" smtClean="0">
+                                  <a:latin typeface="Cambria Math" panose="02040503050406030204" pitchFamily="18" charset="0"/>
+                                </a:rPr>
+                                <m:t>𝑦</m:t>
+                              </m:r>
+                            </m:e>
+                            <m:sup>
+                              <m:r>
+                                <a:rPr lang="en-US" sz="2400" b="0" i="1" smtClean="0">
+                                  <a:latin typeface="Cambria Math" panose="02040503050406030204" pitchFamily="18" charset="0"/>
+                                </a:rPr>
+                                <m:t>2</m:t>
+                              </m:r>
+                            </m:sup>
+                          </m:sSup>
+                          <m:r>
+                            <a:rPr lang="en-US" sz="2400" b="0" i="1" smtClean="0">
+                              <a:latin typeface="Cambria Math" panose="02040503050406030204" pitchFamily="18" charset="0"/>
+                            </a:rPr>
+                            <m:t>+</m:t>
+                          </m:r>
+                          <m:sSup>
+                            <m:sSupPr>
+                              <m:ctrlPr>
+                                <a:rPr lang="en-US" sz="2400" b="0" i="1" smtClean="0">
+                                  <a:latin typeface="Cambria Math" panose="02040503050406030204" pitchFamily="18" charset="0"/>
+                                </a:rPr>
+                              </m:ctrlPr>
+                            </m:sSupPr>
+                            <m:e>
+                              <m:r>
+                                <a:rPr lang="en-US" sz="2400" b="0" i="1" smtClean="0">
+                                  <a:latin typeface="Cambria Math" panose="02040503050406030204" pitchFamily="18" charset="0"/>
+                                </a:rPr>
+                                <m:t>𝑧</m:t>
+                              </m:r>
+                            </m:e>
+                            <m:sup>
+                              <m:r>
+                                <a:rPr lang="en-US" sz="2400" b="0" i="1" smtClean="0">
+                                  <a:latin typeface="Cambria Math" panose="02040503050406030204" pitchFamily="18" charset="0"/>
+                                </a:rPr>
+                                <m:t>2</m:t>
+                              </m:r>
+                            </m:sup>
+                          </m:sSup>
+                        </m:e>
+                      </m:rad>
+                    </m:oMath>
+                  </m:oMathPara>
+                </a14:m>
+                <a:endParaRPr lang="en-US" dirty="0"/>
+              </a:p>
+            </p:txBody>
+          </p:sp>
+        </mc:Choice>
+        <mc:Fallback>
+          <p:sp>
+            <p:nvSpPr>
+              <p:cNvPr id="15" name="TextBox 14">
+                <a:extLst>
+                  <a:ext uri="{FF2B5EF4-FFF2-40B4-BE49-F238E27FC236}">
+                    <a16:creationId xmlns:a16="http://schemas.microsoft.com/office/drawing/2014/main" id="{74E64987-EF2B-B667-EF53-C15FD00DAB24}"/>
+                  </a:ext>
+                </a:extLst>
+              </p:cNvPr>
+              <p:cNvSpPr txBox="1">
+                <a:spLocks noRot="1" noChangeAspect="1" noMove="1" noResize="1" noEditPoints="1" noAdjustHandles="1" noChangeArrowheads="1" noChangeShapeType="1" noTextEdit="1"/>
+              </p:cNvSpPr>
+              <p:nvPr/>
+            </p:nvSpPr>
+            <p:spPr>
+              <a:xfrm>
+                <a:off x="7278116" y="2295734"/>
+                <a:ext cx="3330976" cy="539571"/>
+              </a:xfrm>
+              <a:prstGeom prst="rect">
+                <a:avLst/>
+              </a:prstGeom>
+              <a:blipFill>
+                <a:blip r:embed="rId2"/>
+                <a:stretch>
+                  <a:fillRect/>
+                </a:stretch>
+              </a:blipFill>
+            </p:spPr>
+            <p:txBody>
+              <a:bodyPr/>
+              <a:lstStyle/>
+              <a:p>
+                <a:r>
+                  <a:rPr lang="en-US">
+                    <a:noFill/>
+                  </a:rPr>
+                  <a:t> </a:t>
+                </a:r>
+              </a:p>
+            </p:txBody>
+          </p:sp>
+        </mc:Fallback>
+      </mc:AlternateContent>
+      <mc:AlternateContent xmlns:mc="http://schemas.openxmlformats.org/markup-compatibility/2006">
+        <mc:Choice xmlns:a14="http://schemas.microsoft.com/office/drawing/2010/main" Requires="a14">
+          <p:sp>
+            <p:nvSpPr>
+              <p:cNvPr id="16" name="TextBox 15">
+                <a:extLst>
+                  <a:ext uri="{FF2B5EF4-FFF2-40B4-BE49-F238E27FC236}">
+                    <a16:creationId xmlns:a16="http://schemas.microsoft.com/office/drawing/2014/main" id="{BE69DC2E-55E3-A59A-0285-81813044B013}"/>
+                  </a:ext>
+                </a:extLst>
+              </p:cNvPr>
+              <p:cNvSpPr txBox="1"/>
+              <p:nvPr/>
+            </p:nvSpPr>
+            <p:spPr>
+              <a:xfrm>
+                <a:off x="7740619" y="3429000"/>
+                <a:ext cx="2330061" cy="855299"/>
+              </a:xfrm>
+              <a:prstGeom prst="rect">
+                <a:avLst/>
+              </a:prstGeom>
+              <a:noFill/>
+            </p:spPr>
+            <p:txBody>
+              <a:bodyPr wrap="none" rtlCol="0">
+                <a:spAutoFit/>
+              </a:bodyPr>
+              <a:lstStyle/>
+              <a:p>
+                <a14:m>
+                  <m:oMathPara xmlns:m="http://schemas.openxmlformats.org/officeDocument/2006/math">
+                    <m:oMathParaPr>
+                      <m:jc m:val="centerGroup"/>
+                    </m:oMathParaPr>
+                    <m:oMath xmlns:m="http://schemas.openxmlformats.org/officeDocument/2006/math">
+                      <m:r>
+                        <a:rPr lang="en-US" sz="2400" b="0" i="1" smtClean="0">
+                          <a:latin typeface="Cambria Math" panose="02040503050406030204" pitchFamily="18" charset="0"/>
+                        </a:rPr>
+                        <m:t>𝑥</m:t>
+                      </m:r>
+                      <m:r>
+                        <a:rPr lang="en-US" sz="2400" b="0" i="1" smtClean="0">
+                          <a:latin typeface="Cambria Math" panose="02040503050406030204" pitchFamily="18" charset="0"/>
+                        </a:rPr>
+                        <m:t>=</m:t>
+                      </m:r>
+                      <m:r>
+                        <a:rPr lang="en-US" sz="2400" b="0" i="1" smtClean="0">
+                          <a:latin typeface="Cambria Math" panose="02040503050406030204" pitchFamily="18" charset="0"/>
+                        </a:rPr>
+                        <m:t>𝑦</m:t>
+                      </m:r>
+                      <m:r>
+                        <a:rPr lang="en-US" sz="2400" b="0" i="1" smtClean="0">
+                          <a:latin typeface="Cambria Math" panose="02040503050406030204" pitchFamily="18" charset="0"/>
+                        </a:rPr>
+                        <m:t>=</m:t>
+                      </m:r>
+                      <m:r>
+                        <a:rPr lang="en-US" sz="2400" b="0" i="1" smtClean="0">
+                          <a:latin typeface="Cambria Math" panose="02040503050406030204" pitchFamily="18" charset="0"/>
+                        </a:rPr>
+                        <m:t>𝑧</m:t>
+                      </m:r>
+                      <m:r>
+                        <a:rPr lang="en-US" sz="2400" b="0" i="1" smtClean="0">
+                          <a:latin typeface="Cambria Math" panose="02040503050406030204" pitchFamily="18" charset="0"/>
+                        </a:rPr>
+                        <m:t>=</m:t>
+                      </m:r>
+                      <m:f>
+                        <m:fPr>
+                          <m:ctrlPr>
+                            <a:rPr lang="en-US" sz="2400" b="0" i="1" smtClean="0">
+                              <a:latin typeface="Cambria Math" panose="02040503050406030204" pitchFamily="18" charset="0"/>
+                            </a:rPr>
+                          </m:ctrlPr>
+                        </m:fPr>
+                        <m:num>
+                          <m:r>
+                            <a:rPr lang="en-US" sz="2400" b="0" i="1" smtClean="0">
+                              <a:latin typeface="Cambria Math" panose="02040503050406030204" pitchFamily="18" charset="0"/>
+                            </a:rPr>
+                            <m:t>1</m:t>
+                          </m:r>
+                        </m:num>
+                        <m:den>
+                          <m:rad>
+                            <m:radPr>
+                              <m:degHide m:val="on"/>
+                              <m:ctrlPr>
+                                <a:rPr lang="en-US" sz="2400" b="0" i="1" smtClean="0">
+                                  <a:latin typeface="Cambria Math" panose="02040503050406030204" pitchFamily="18" charset="0"/>
+                                </a:rPr>
+                              </m:ctrlPr>
+                            </m:radPr>
+                            <m:deg/>
+                            <m:e>
+                              <m:r>
+                                <a:rPr lang="en-US" sz="2400" b="0" i="1" smtClean="0">
+                                  <a:latin typeface="Cambria Math" panose="02040503050406030204" pitchFamily="18" charset="0"/>
+                                </a:rPr>
+                                <m:t>3</m:t>
+                              </m:r>
+                            </m:e>
+                          </m:rad>
+                        </m:den>
+                      </m:f>
+                    </m:oMath>
+                  </m:oMathPara>
+                </a14:m>
+                <a:endParaRPr lang="en-US" dirty="0"/>
+              </a:p>
+            </p:txBody>
+          </p:sp>
+        </mc:Choice>
+        <mc:Fallback>
+          <p:sp>
+            <p:nvSpPr>
+              <p:cNvPr id="16" name="TextBox 15">
+                <a:extLst>
+                  <a:ext uri="{FF2B5EF4-FFF2-40B4-BE49-F238E27FC236}">
+                    <a16:creationId xmlns:a16="http://schemas.microsoft.com/office/drawing/2014/main" id="{BE69DC2E-55E3-A59A-0285-81813044B013}"/>
+                  </a:ext>
+                </a:extLst>
+              </p:cNvPr>
+              <p:cNvSpPr txBox="1">
+                <a:spLocks noRot="1" noChangeAspect="1" noMove="1" noResize="1" noEditPoints="1" noAdjustHandles="1" noChangeArrowheads="1" noChangeShapeType="1" noTextEdit="1"/>
+              </p:cNvSpPr>
+              <p:nvPr/>
+            </p:nvSpPr>
+            <p:spPr>
+              <a:xfrm>
+                <a:off x="7740619" y="3429000"/>
+                <a:ext cx="2330061" cy="855299"/>
+              </a:xfrm>
+              <a:prstGeom prst="rect">
+                <a:avLst/>
+              </a:prstGeom>
+              <a:blipFill>
+                <a:blip r:embed="rId3"/>
+                <a:stretch>
+                  <a:fillRect/>
+                </a:stretch>
+              </a:blipFill>
+            </p:spPr>
+            <p:txBody>
+              <a:bodyPr/>
+              <a:lstStyle/>
+              <a:p>
+                <a:r>
+                  <a:rPr lang="en-US">
+                    <a:noFill/>
+                  </a:rPr>
+                  <a:t> </a:t>
+                </a:r>
+              </a:p>
+            </p:txBody>
+          </p:sp>
+        </mc:Fallback>
+      </mc:AlternateContent>
+      <mc:AlternateContent xmlns:mc="http://schemas.openxmlformats.org/markup-compatibility/2006">
+        <mc:Choice xmlns:a14="http://schemas.microsoft.com/office/drawing/2010/main" Requires="a14">
+          <p:sp>
+            <p:nvSpPr>
+              <p:cNvPr id="21" name="TextBox 20">
+                <a:extLst>
+                  <a:ext uri="{FF2B5EF4-FFF2-40B4-BE49-F238E27FC236}">
+                    <a16:creationId xmlns:a16="http://schemas.microsoft.com/office/drawing/2014/main" id="{DD5019FE-136D-F5F0-D852-F3723DF993E2}"/>
+                  </a:ext>
+                </a:extLst>
+              </p:cNvPr>
+              <p:cNvSpPr txBox="1"/>
+              <p:nvPr/>
+            </p:nvSpPr>
+            <p:spPr>
+              <a:xfrm>
+                <a:off x="7585330" y="4560805"/>
+                <a:ext cx="976293" cy="783804"/>
+              </a:xfrm>
+              <a:prstGeom prst="rect">
+                <a:avLst/>
+              </a:prstGeom>
+              <a:noFill/>
+            </p:spPr>
+            <p:txBody>
+              <a:bodyPr wrap="none" rtlCol="0">
+                <a:spAutoFit/>
+              </a:bodyPr>
+              <a:lstStyle/>
+              <a:p>
+                <a14:m>
+                  <m:oMathPara xmlns:m="http://schemas.openxmlformats.org/officeDocument/2006/math">
+                    <m:oMathParaPr>
+                      <m:jc m:val="centerGroup"/>
+                    </m:oMathParaPr>
+                    <m:oMath xmlns:m="http://schemas.openxmlformats.org/officeDocument/2006/math">
+                      <m:r>
+                        <a:rPr lang="en-US" sz="2400" b="0" i="1" smtClean="0">
+                          <a:latin typeface="Cambria Math" panose="02040503050406030204" pitchFamily="18" charset="0"/>
+                        </a:rPr>
+                        <m:t>𝑟</m:t>
+                      </m:r>
+                      <m:r>
+                        <a:rPr lang="en-US" sz="2400" b="0" i="1" smtClean="0">
+                          <a:latin typeface="Cambria Math" panose="02040503050406030204" pitchFamily="18" charset="0"/>
+                        </a:rPr>
+                        <m:t>=</m:t>
+                      </m:r>
+                      <m:f>
+                        <m:fPr>
+                          <m:ctrlPr>
+                            <a:rPr lang="en-US" sz="2400" b="0" i="1" smtClean="0">
+                              <a:latin typeface="Cambria Math" panose="02040503050406030204" pitchFamily="18" charset="0"/>
+                            </a:rPr>
+                          </m:ctrlPr>
+                        </m:fPr>
+                        <m:num>
+                          <m:r>
+                            <a:rPr lang="en-US" sz="2400" b="0" i="1" smtClean="0">
+                              <a:latin typeface="Cambria Math" panose="02040503050406030204" pitchFamily="18" charset="0"/>
+                            </a:rPr>
+                            <m:t>1</m:t>
+                          </m:r>
+                        </m:num>
+                        <m:den>
+                          <m:r>
+                            <a:rPr lang="en-US" sz="2400" b="0" i="1" smtClean="0">
+                              <a:latin typeface="Cambria Math" panose="02040503050406030204" pitchFamily="18" charset="0"/>
+                            </a:rPr>
+                            <m:t>2</m:t>
+                          </m:r>
+                        </m:den>
+                      </m:f>
+                    </m:oMath>
+                  </m:oMathPara>
+                </a14:m>
+                <a:endParaRPr lang="en-US" dirty="0"/>
+              </a:p>
+            </p:txBody>
+          </p:sp>
+        </mc:Choice>
+        <mc:Fallback>
+          <p:sp>
+            <p:nvSpPr>
+              <p:cNvPr id="21" name="TextBox 20">
+                <a:extLst>
+                  <a:ext uri="{FF2B5EF4-FFF2-40B4-BE49-F238E27FC236}">
+                    <a16:creationId xmlns:a16="http://schemas.microsoft.com/office/drawing/2014/main" id="{DD5019FE-136D-F5F0-D852-F3723DF993E2}"/>
+                  </a:ext>
+                </a:extLst>
+              </p:cNvPr>
+              <p:cNvSpPr txBox="1">
+                <a:spLocks noRot="1" noChangeAspect="1" noMove="1" noResize="1" noEditPoints="1" noAdjustHandles="1" noChangeArrowheads="1" noChangeShapeType="1" noTextEdit="1"/>
+              </p:cNvSpPr>
+              <p:nvPr/>
+            </p:nvSpPr>
+            <p:spPr>
+              <a:xfrm>
+                <a:off x="7585330" y="4560805"/>
+                <a:ext cx="976293" cy="783804"/>
+              </a:xfrm>
+              <a:prstGeom prst="rect">
+                <a:avLst/>
+              </a:prstGeom>
+              <a:blipFill>
+                <a:blip r:embed="rId4"/>
+                <a:stretch>
+                  <a:fillRect/>
+                </a:stretch>
+              </a:blipFill>
+            </p:spPr>
+            <p:txBody>
+              <a:bodyPr/>
+              <a:lstStyle/>
+              <a:p>
+                <a:r>
+                  <a:rPr lang="en-US">
+                    <a:noFill/>
+                  </a:rPr>
+                  <a:t> </a:t>
+                </a:r>
+              </a:p>
+            </p:txBody>
+          </p:sp>
+        </mc:Fallback>
+      </mc:AlternateContent>
+      <p:grpSp>
+        <p:nvGrpSpPr>
+          <p:cNvPr id="35" name="Group 34">
+            <a:extLst>
+              <a:ext uri="{FF2B5EF4-FFF2-40B4-BE49-F238E27FC236}">
+                <a16:creationId xmlns:a16="http://schemas.microsoft.com/office/drawing/2014/main" id="{B6E55791-3C34-B25C-BB9F-7F8EBACCBB49}"/>
+              </a:ext>
+            </a:extLst>
+          </p:cNvPr>
+          <p:cNvGrpSpPr/>
+          <p:nvPr/>
+        </p:nvGrpSpPr>
+        <p:grpSpPr>
+          <a:xfrm>
+            <a:off x="2371790" y="2380734"/>
+            <a:ext cx="3219729" cy="2571973"/>
+            <a:chOff x="3481204" y="2369479"/>
+            <a:chExt cx="3219729" cy="2571973"/>
+          </a:xfrm>
+        </p:grpSpPr>
+        <p:pic>
+          <p:nvPicPr>
+            <p:cNvPr id="30" name="Picture 29">
+              <a:extLst>
+                <a:ext uri="{FF2B5EF4-FFF2-40B4-BE49-F238E27FC236}">
+                  <a16:creationId xmlns:a16="http://schemas.microsoft.com/office/drawing/2014/main" id="{BE1AC53D-E9FD-C182-AD54-F650D17F44F9}"/>
+                </a:ext>
+              </a:extLst>
+            </p:cNvPr>
+            <p:cNvPicPr>
+              <a:picLocks noChangeAspect="1"/>
+            </p:cNvPicPr>
+            <p:nvPr/>
+          </p:nvPicPr>
+          <p:blipFill>
+            <a:blip r:embed="rId5"/>
+            <a:stretch>
+              <a:fillRect/>
+            </a:stretch>
+          </p:blipFill>
+          <p:spPr>
+            <a:xfrm>
+              <a:off x="3481204" y="2369479"/>
+              <a:ext cx="3219729" cy="2571973"/>
+            </a:xfrm>
+            <a:prstGeom prst="rect">
+              <a:avLst/>
+            </a:prstGeom>
+          </p:spPr>
+        </p:pic>
+        <p:cxnSp>
+          <p:nvCxnSpPr>
+            <p:cNvPr id="31" name="Straight Connector 30">
+              <a:extLst>
+                <a:ext uri="{FF2B5EF4-FFF2-40B4-BE49-F238E27FC236}">
+                  <a16:creationId xmlns:a16="http://schemas.microsoft.com/office/drawing/2014/main" id="{92252B19-529B-A816-EDCE-A4F7B25E0959}"/>
+                </a:ext>
+              </a:extLst>
+            </p:cNvPr>
+            <p:cNvCxnSpPr>
+              <a:cxnSpLocks/>
+            </p:cNvCxnSpPr>
+            <p:nvPr/>
+          </p:nvCxnSpPr>
+          <p:spPr>
+            <a:xfrm flipV="1">
+              <a:off x="4711399" y="2721532"/>
+              <a:ext cx="814004" cy="1696262"/>
+            </a:xfrm>
+            <a:prstGeom prst="line">
+              <a:avLst/>
+            </a:prstGeom>
+            <a:ln w="38100">
+              <a:solidFill>
+                <a:srgbClr val="FF0000"/>
+              </a:solidFill>
+            </a:ln>
+          </p:spPr>
+          <p:style>
+            <a:lnRef idx="3">
+              <a:schemeClr val="accent2"/>
+            </a:lnRef>
+            <a:fillRef idx="0">
+              <a:schemeClr val="accent2"/>
+            </a:fillRef>
+            <a:effectRef idx="2">
+              <a:schemeClr val="accent2"/>
+            </a:effectRef>
+            <a:fontRef idx="minor">
+              <a:schemeClr val="tx1"/>
+            </a:fontRef>
+          </p:style>
+        </p:cxnSp>
+        <mc:AlternateContent xmlns:mc="http://schemas.openxmlformats.org/markup-compatibility/2006">
+          <mc:Choice xmlns:a14="http://schemas.microsoft.com/office/drawing/2010/main" Requires="a14">
+            <p:sp>
+              <p:nvSpPr>
+                <p:cNvPr id="34" name="TextBox 33">
+                  <a:extLst>
+                    <a:ext uri="{FF2B5EF4-FFF2-40B4-BE49-F238E27FC236}">
+                      <a16:creationId xmlns:a16="http://schemas.microsoft.com/office/drawing/2014/main" id="{7F342656-0446-C60A-740B-71DF3AA278DB}"/>
+                    </a:ext>
+                  </a:extLst>
+                </p:cNvPr>
+                <p:cNvSpPr txBox="1"/>
+                <p:nvPr/>
+              </p:nvSpPr>
+              <p:spPr>
+                <a:xfrm>
+                  <a:off x="4711399" y="3198167"/>
+                  <a:ext cx="574516" cy="461665"/>
+                </a:xfrm>
+                <a:prstGeom prst="rect">
+                  <a:avLst/>
+                </a:prstGeom>
+                <a:noFill/>
+              </p:spPr>
+              <p:txBody>
+                <a:bodyPr wrap="none" rtlCol="0">
+                  <a:spAutoFit/>
+                </a:bodyPr>
+                <a:lstStyle/>
+                <a:p>
+                  <a14:m>
+                    <m:oMathPara xmlns:m="http://schemas.openxmlformats.org/officeDocument/2006/math">
+                      <m:oMathParaPr>
+                        <m:jc m:val="centerGroup"/>
+                      </m:oMathParaPr>
+                      <m:oMath xmlns:m="http://schemas.openxmlformats.org/officeDocument/2006/math">
+                        <m:r>
+                          <a:rPr lang="en-US" sz="2400" b="0" i="1" dirty="0" smtClean="0">
+                            <a:latin typeface="Cambria Math" panose="02040503050406030204" pitchFamily="18" charset="0"/>
+                          </a:rPr>
+                          <m:t>2</m:t>
+                        </m:r>
+                        <m:r>
+                          <a:rPr lang="en-US" sz="2400" i="1" dirty="0" smtClean="0">
+                            <a:latin typeface="Cambria Math" panose="02040503050406030204" pitchFamily="18" charset="0"/>
+                          </a:rPr>
+                          <m:t>𝑟</m:t>
+                        </m:r>
+                      </m:oMath>
+                    </m:oMathPara>
+                  </a14:m>
+                </a:p>
+              </p:txBody>
+            </p:sp>
+          </mc:Choice>
+          <mc:Fallback>
+            <p:sp>
+              <p:nvSpPr>
+                <p:cNvPr id="34" name="TextBox 33">
+                  <a:extLst>
+                    <a:ext uri="{FF2B5EF4-FFF2-40B4-BE49-F238E27FC236}">
+                      <a16:creationId xmlns:a16="http://schemas.microsoft.com/office/drawing/2014/main" id="{7F342656-0446-C60A-740B-71DF3AA278DB}"/>
+                    </a:ext>
+                  </a:extLst>
+                </p:cNvPr>
+                <p:cNvSpPr txBox="1">
+                  <a:spLocks noRot="1" noChangeAspect="1" noMove="1" noResize="1" noEditPoints="1" noAdjustHandles="1" noChangeArrowheads="1" noChangeShapeType="1" noTextEdit="1"/>
+                </p:cNvSpPr>
+                <p:nvPr/>
+              </p:nvSpPr>
+              <p:spPr>
+                <a:xfrm>
+                  <a:off x="4711399" y="3198167"/>
+                  <a:ext cx="574516" cy="461665"/>
+                </a:xfrm>
+                <a:prstGeom prst="rect">
+                  <a:avLst/>
+                </a:prstGeom>
+                <a:blipFill>
+                  <a:blip r:embed="rId6"/>
+                  <a:stretch>
+                    <a:fillRect t="-10526" r="-21277" b="-28947"/>
+                  </a:stretch>
+                </a:blipFill>
+              </p:spPr>
+              <p:txBody>
+                <a:bodyPr/>
+                <a:lstStyle/>
+                <a:p>
+                  <a:r>
+                    <a:rPr lang="en-US">
+                      <a:noFill/>
+                    </a:rPr>
+                    <a:t> </a:t>
+                  </a:r>
+                </a:p>
+              </p:txBody>
+            </p:sp>
+          </mc:Fallback>
+        </mc:AlternateContent>
+      </p:grpSp>
+    </p:spTree>
+    <p:extLst>
+      <p:ext uri="{BB962C8B-B14F-4D97-AF65-F5344CB8AC3E}">
+        <p14:creationId xmlns:p14="http://schemas.microsoft.com/office/powerpoint/2010/main" val="3429072753"/>
+      </p:ext>
+    </p:extLst>
+  </p:cSld>
+  <p:clrMapOvr>
+    <a:masterClrMapping/>
+  </p:clrMapOvr>
+</p:sld>
+</file>
+
+<file path=ppt/slides/slide15.xml><?xml version="1.0" encoding="utf-8"?>
+<p:sld xmlns:a="http://schemas.openxmlformats.org/drawingml/2006/main" xmlns:r="http://schemas.openxmlformats.org/officeDocument/2006/relationships" xmlns:p="http://schemas.openxmlformats.org/presentationml/2006/main">
+  <p:cSld>
+    <p:spTree>
+      <p:nvGrpSpPr>
+        <p:cNvPr id="1" name=""/>
+        <p:cNvGrpSpPr/>
+        <p:nvPr/>
+      </p:nvGrpSpPr>
+      <p:grpSpPr>
+        <a:xfrm>
+          <a:off x="0" y="0"/>
+          <a:ext cx="0" cy="0"/>
+          <a:chOff x="0" y="0"/>
+          <a:chExt cx="0" cy="0"/>
+        </a:xfrm>
+      </p:grpSpPr>
+      <p:sp>
+        <p:nvSpPr>
+          <p:cNvPr id="2" name="Title 1">
+            <a:extLst>
+              <a:ext uri="{FF2B5EF4-FFF2-40B4-BE49-F238E27FC236}">
                 <a16:creationId xmlns:a16="http://schemas.microsoft.com/office/drawing/2014/main" id="{24E52D3D-C042-F227-F593-6828804FD0A2}"/>
               </a:ext>
             </a:extLst>
@@ -5982,7 +7625,7 @@
         </p:nvSpPr>
         <p:spPr>
           <a:xfrm>
-            <a:off x="6676338" y="1398767"/>
+            <a:off x="6548725" y="1499154"/>
             <a:ext cx="3949522" cy="4155583"/>
           </a:xfrm>
           <a:prstGeom prst="donut">
@@ -6032,7 +7675,7 @@
         </p:nvSpPr>
         <p:spPr>
           <a:xfrm>
-            <a:off x="8290263" y="3346291"/>
+            <a:off x="8162650" y="3303380"/>
             <a:ext cx="721672" cy="369332"/>
           </a:xfrm>
           <a:prstGeom prst="rect">
@@ -6054,61 +7697,6 @@
               </a:rPr>
               <a:t>0,0,-5</a:t>
             </a:r>
-          </a:p>
-        </p:txBody>
-      </p:sp>
-      <p:sp>
-        <p:nvSpPr>
-          <p:cNvPr id="6" name="TextBox 5">
-            <a:extLst>
-              <a:ext uri="{FF2B5EF4-FFF2-40B4-BE49-F238E27FC236}">
-                <a16:creationId xmlns:a16="http://schemas.microsoft.com/office/drawing/2014/main" id="{C5800AB0-5032-A007-A5A4-2E7D47962D34}"/>
-              </a:ext>
-            </a:extLst>
-          </p:cNvPr>
-          <p:cNvSpPr txBox="1"/>
-          <p:nvPr/>
-        </p:nvSpPr>
-        <p:spPr>
-          <a:xfrm>
-            <a:off x="10109621" y="1828731"/>
-            <a:ext cx="1760418" cy="369332"/>
-          </a:xfrm>
-          <a:prstGeom prst="rect">
-            <a:avLst/>
-          </a:prstGeom>
-          <a:noFill/>
-        </p:spPr>
-        <p:txBody>
-          <a:bodyPr wrap="none" rtlCol="0">
-            <a:spAutoFit/>
-          </a:bodyPr>
-          <a:lstStyle/>
-          <a:p>
-            <a:r>
-              <a:rPr lang="en-US" dirty="0"/>
-              <a:t>0,0,-5 </a:t>
-            </a:r>
-            <a:r>
-              <a:rPr lang="en-US" dirty="0">
-                <a:sym typeface="Wingdings" panose="05000000000000000000" pitchFamily="2" charset="2"/>
-              </a:rPr>
-              <a:t> 0,0, </a:t>
-            </a:r>
-            <a:r>
-              <a:rPr lang="en-US" b="1" dirty="0">
-                <a:solidFill>
-                  <a:srgbClr val="FF0000"/>
-                </a:solidFill>
-                <a:sym typeface="Wingdings" panose="05000000000000000000" pitchFamily="2" charset="2"/>
-              </a:rPr>
-              <a:t>-10</a:t>
-            </a:r>
-            <a:endParaRPr lang="en-US" b="1" dirty="0">
-              <a:solidFill>
-                <a:srgbClr val="FF0000"/>
-              </a:solidFill>
-            </a:endParaRPr>
           </a:p>
         </p:txBody>
       </p:sp>
@@ -6126,7 +7714,214 @@
         </p:nvSpPr>
         <p:spPr>
           <a:xfrm>
-            <a:off x="9255048" y="2919813"/>
+            <a:off x="8223639" y="4989514"/>
+            <a:ext cx="721672" cy="369332"/>
+          </a:xfrm>
+          <a:prstGeom prst="rect">
+            <a:avLst/>
+          </a:prstGeom>
+          <a:solidFill>
+            <a:schemeClr val="accent1">
+              <a:lumMod val="40000"/>
+              <a:lumOff val="60000"/>
+            </a:schemeClr>
+          </a:solidFill>
+        </p:spPr>
+        <p:txBody>
+          <a:bodyPr wrap="none" rtlCol="0">
+            <a:spAutoFit/>
+          </a:bodyPr>
+          <a:lstStyle/>
+          <a:p>
+            <a:r>
+              <a:rPr lang="en-US" dirty="0"/>
+              <a:t>0,0,-2</a:t>
+            </a:r>
+            <a:endParaRPr lang="en-US" b="1" dirty="0">
+              <a:solidFill>
+                <a:srgbClr val="FF0000"/>
+              </a:solidFill>
+            </a:endParaRPr>
+          </a:p>
+        </p:txBody>
+      </p:sp>
+      <p:sp>
+        <p:nvSpPr>
+          <p:cNvPr id="9" name="TextBox 8">
+            <a:extLst>
+              <a:ext uri="{FF2B5EF4-FFF2-40B4-BE49-F238E27FC236}">
+                <a16:creationId xmlns:a16="http://schemas.microsoft.com/office/drawing/2014/main" id="{9A1D111A-3840-390A-6274-795575564DEC}"/>
+              </a:ext>
+            </a:extLst>
+          </p:cNvPr>
+          <p:cNvSpPr txBox="1"/>
+          <p:nvPr/>
+        </p:nvSpPr>
+        <p:spPr>
+          <a:xfrm>
+            <a:off x="434378" y="2099796"/>
+            <a:ext cx="6096000" cy="3416320"/>
+          </a:xfrm>
+          <a:prstGeom prst="rect">
+            <a:avLst/>
+          </a:prstGeom>
+          <a:noFill/>
+        </p:spPr>
+        <p:txBody>
+          <a:bodyPr wrap="square">
+            <a:spAutoFit/>
+          </a:bodyPr>
+          <a:lstStyle/>
+          <a:p>
+            <a:r>
+              <a:rPr lang="en-US" sz="2400" dirty="0"/>
+              <a:t>&lt;</a:t>
+            </a:r>
+            <a:r>
+              <a:rPr lang="en-US" sz="2400" b="1" dirty="0"/>
+              <a:t>a-entity</a:t>
+            </a:r>
+            <a:r>
+              <a:rPr lang="en-US" sz="2400" dirty="0"/>
+              <a:t> position="</a:t>
+            </a:r>
+            <a:r>
+              <a:rPr lang="en-US" sz="2400" b="1" dirty="0">
+                <a:solidFill>
+                  <a:srgbClr val="7030A0"/>
+                </a:solidFill>
+              </a:rPr>
+              <a:t>0 0 -5</a:t>
+            </a:r>
+            <a:r>
+              <a:rPr lang="en-US" sz="2400" dirty="0"/>
+              <a:t>" </a:t>
+            </a:r>
+          </a:p>
+          <a:p>
+            <a:r>
+              <a:rPr lang="en-US" sz="2400" dirty="0"/>
+              <a:t>	animation="property: rotation; </a:t>
+            </a:r>
+          </a:p>
+          <a:p>
+            <a:r>
+              <a:rPr lang="en-US" sz="2400" dirty="0"/>
+              <a:t>	to: 0 360 0;    </a:t>
+            </a:r>
+            <a:r>
+              <a:rPr lang="en-US" sz="2400" dirty="0">
+                <a:solidFill>
+                  <a:srgbClr val="FF0000"/>
+                </a:solidFill>
+              </a:rPr>
+              <a:t>rotates around the y-axis</a:t>
+            </a:r>
+            <a:endParaRPr lang="en-US" sz="2400" dirty="0"/>
+          </a:p>
+          <a:p>
+            <a:r>
+              <a:rPr lang="en-US" sz="2400" dirty="0"/>
+              <a:t>	loop: true; dur:10000 "&gt;</a:t>
+            </a:r>
+          </a:p>
+          <a:p>
+            <a:r>
+              <a:rPr lang="en-US" sz="2400" dirty="0"/>
+              <a:t>	</a:t>
+            </a:r>
+            <a:r>
+              <a:rPr lang="en-US" sz="2400" dirty="0">
+                <a:solidFill>
+                  <a:schemeClr val="accent1"/>
+                </a:solidFill>
+              </a:rPr>
+              <a:t>&lt;a-sphere         position="</a:t>
+            </a:r>
+            <a:r>
+              <a:rPr lang="en-US" sz="2400" dirty="0">
+                <a:solidFill>
+                  <a:srgbClr val="FF0000"/>
+                </a:solidFill>
+              </a:rPr>
+              <a:t>0 0 -2</a:t>
+            </a:r>
+            <a:r>
+              <a:rPr lang="en-US" sz="2400" dirty="0">
+                <a:solidFill>
+                  <a:schemeClr val="accent1"/>
+                </a:solidFill>
+              </a:rPr>
+              <a:t>" 				 </a:t>
+            </a:r>
+            <a:r>
+              <a:rPr lang="en-US" sz="2400" dirty="0" err="1">
+                <a:solidFill>
+                  <a:schemeClr val="accent1"/>
+                </a:solidFill>
+              </a:rPr>
+              <a:t>src</a:t>
+            </a:r>
+            <a:r>
+              <a:rPr lang="en-US" sz="2400" dirty="0">
+                <a:solidFill>
+                  <a:schemeClr val="accent1"/>
+                </a:solidFill>
+              </a:rPr>
+              <a:t>="#mars" </a:t>
+            </a:r>
+          </a:p>
+          <a:p>
+            <a:r>
+              <a:rPr lang="en-US" sz="2400" dirty="0">
+                <a:solidFill>
+                  <a:schemeClr val="accent1"/>
+                </a:solidFill>
+              </a:rPr>
+              <a:t>			rotation="0 0 0" &gt;</a:t>
+            </a:r>
+          </a:p>
+          <a:p>
+            <a:r>
+              <a:rPr lang="en-US" sz="2400" dirty="0">
+                <a:solidFill>
+                  <a:schemeClr val="accent1"/>
+                </a:solidFill>
+              </a:rPr>
+              <a:t>	&lt;/a-sphere&gt;</a:t>
+            </a:r>
+          </a:p>
+          <a:p>
+            <a:r>
+              <a:rPr lang="en-US" sz="2400" dirty="0"/>
+              <a:t>&lt;/</a:t>
+            </a:r>
+            <a:r>
+              <a:rPr lang="en-US" sz="2400" b="1" dirty="0"/>
+              <a:t>a-entity</a:t>
+            </a:r>
+            <a:r>
+              <a:rPr lang="en-US" sz="2400" dirty="0"/>
+              <a:t>&gt;</a:t>
+            </a:r>
+          </a:p>
+        </p:txBody>
+      </p:sp>
+      <p:sp>
+        <p:nvSpPr>
+          <p:cNvPr id="3" name="TextBox 2">
+            <a:extLst>
+              <a:ext uri="{FF2B5EF4-FFF2-40B4-BE49-F238E27FC236}">
+                <a16:creationId xmlns:a16="http://schemas.microsoft.com/office/drawing/2014/main" id="{46A5AD14-281C-5DB4-BB9D-24009B2E61CC}"/>
+              </a:ext>
+            </a:extLst>
+          </p:cNvPr>
+          <p:cNvSpPr txBox="1"/>
+          <p:nvPr/>
+        </p:nvSpPr>
+        <p:spPr>
+          <a:xfrm>
+            <a:off x="7610669" y="1868486"/>
             <a:ext cx="1643399" cy="369332"/>
           </a:xfrm>
           <a:prstGeom prst="rect">
@@ -6146,7 +7941,11 @@
           <a:lstStyle/>
           <a:p>
             <a:r>
-              <a:rPr lang="en-US" dirty="0"/>
+              <a:rPr lang="en-US" dirty="0">
+                <a:highlight>
+                  <a:srgbClr val="FFFF00"/>
+                </a:highlight>
+              </a:rPr>
               <a:t>0,0,-2 </a:t>
             </a:r>
             <a:r>
@@ -6169,216 +7968,6 @@
                 <a:srgbClr val="FF0000"/>
               </a:solidFill>
             </a:endParaRPr>
-          </a:p>
-        </p:txBody>
-      </p:sp>
-      <p:sp>
-        <p:nvSpPr>
-          <p:cNvPr id="9" name="TextBox 8">
-            <a:extLst>
-              <a:ext uri="{FF2B5EF4-FFF2-40B4-BE49-F238E27FC236}">
-                <a16:creationId xmlns:a16="http://schemas.microsoft.com/office/drawing/2014/main" id="{9A1D111A-3840-390A-6274-795575564DEC}"/>
-              </a:ext>
-            </a:extLst>
-          </p:cNvPr>
-          <p:cNvSpPr txBox="1"/>
-          <p:nvPr/>
-        </p:nvSpPr>
-        <p:spPr>
-          <a:xfrm>
-            <a:off x="434378" y="2099796"/>
-            <a:ext cx="6096000" cy="3139321"/>
-          </a:xfrm>
-          <a:prstGeom prst="rect">
-            <a:avLst/>
-          </a:prstGeom>
-          <a:noFill/>
-        </p:spPr>
-        <p:txBody>
-          <a:bodyPr wrap="square">
-            <a:spAutoFit/>
-          </a:bodyPr>
-          <a:lstStyle/>
-          <a:p>
-            <a:r>
-              <a:rPr lang="en-US" dirty="0"/>
-              <a:t>&lt;a-assets&gt;</a:t>
-            </a:r>
-          </a:p>
-          <a:p>
-            <a:r>
-              <a:rPr lang="en-US" dirty="0"/>
-              <a:t>   &lt;</a:t>
-            </a:r>
-            <a:r>
-              <a:rPr lang="en-US" dirty="0" err="1"/>
-              <a:t>img</a:t>
-            </a:r>
-            <a:r>
-              <a:rPr lang="en-US" dirty="0"/>
-              <a:t> id="mars" </a:t>
-            </a:r>
-            <a:r>
-              <a:rPr lang="en-US" dirty="0" err="1"/>
-              <a:t>src</a:t>
-            </a:r>
-            <a:r>
-              <a:rPr lang="en-US" dirty="0"/>
-              <a:t>="./IMAGES/mars-</a:t>
-            </a:r>
-            <a:r>
-              <a:rPr lang="en-US" dirty="0" err="1"/>
-              <a:t>surface.avif</a:t>
-            </a:r>
-            <a:r>
-              <a:rPr lang="en-US" dirty="0"/>
-              <a:t>“&gt;</a:t>
-            </a:r>
-          </a:p>
-          <a:p>
-            <a:r>
-              <a:rPr lang="en-US" dirty="0"/>
-              <a:t>&lt;/a-assets&gt;</a:t>
-            </a:r>
-          </a:p>
-          <a:p>
-            <a:r>
-              <a:rPr lang="en-US" dirty="0"/>
-              <a:t>&lt;</a:t>
-            </a:r>
-            <a:r>
-              <a:rPr lang="en-US" b="1" dirty="0"/>
-              <a:t>a-entity</a:t>
-            </a:r>
-            <a:r>
-              <a:rPr lang="en-US" dirty="0"/>
-              <a:t> position="</a:t>
-            </a:r>
-            <a:r>
-              <a:rPr lang="en-US" b="1" dirty="0">
-                <a:solidFill>
-                  <a:srgbClr val="7030A0"/>
-                </a:solidFill>
-              </a:rPr>
-              <a:t>0 0 -5</a:t>
-            </a:r>
-            <a:r>
-              <a:rPr lang="en-US" dirty="0"/>
-              <a:t>" </a:t>
-            </a:r>
-          </a:p>
-          <a:p>
-            <a:r>
-              <a:rPr lang="en-US" dirty="0"/>
-              <a:t>	animation="property: rotation; </a:t>
-            </a:r>
-          </a:p>
-          <a:p>
-            <a:r>
-              <a:rPr lang="en-US" dirty="0"/>
-              <a:t>	to: 0 360 0;    </a:t>
-            </a:r>
-            <a:r>
-              <a:rPr lang="en-US" dirty="0">
-                <a:solidFill>
-                  <a:srgbClr val="FF0000"/>
-                </a:solidFill>
-              </a:rPr>
-              <a:t>rotates around the y-axis</a:t>
-            </a:r>
-            <a:endParaRPr lang="en-US" dirty="0"/>
-          </a:p>
-          <a:p>
-            <a:r>
-              <a:rPr lang="en-US" dirty="0"/>
-              <a:t>	loop: true; dur:10000 "&gt;</a:t>
-            </a:r>
-          </a:p>
-          <a:p>
-            <a:r>
-              <a:rPr lang="en-US" dirty="0"/>
-              <a:t>	</a:t>
-            </a:r>
-            <a:r>
-              <a:rPr lang="en-US" dirty="0">
-                <a:solidFill>
-                  <a:schemeClr val="accent1"/>
-                </a:solidFill>
-              </a:rPr>
-              <a:t>&lt;a-sphere  id="</a:t>
-            </a:r>
-            <a:r>
-              <a:rPr lang="en-US" dirty="0" err="1">
-                <a:solidFill>
-                  <a:schemeClr val="accent1"/>
-                </a:solidFill>
-              </a:rPr>
-              <a:t>MySphere</a:t>
-            </a:r>
-            <a:r>
-              <a:rPr lang="en-US" dirty="0">
-                <a:solidFill>
-                  <a:schemeClr val="accent1"/>
-                </a:solidFill>
-              </a:rPr>
-              <a:t>" position="</a:t>
-            </a:r>
-            <a:r>
-              <a:rPr lang="en-US" dirty="0">
-                <a:solidFill>
-                  <a:srgbClr val="FF0000"/>
-                </a:solidFill>
-              </a:rPr>
-              <a:t>0 0 -2</a:t>
-            </a:r>
-            <a:r>
-              <a:rPr lang="en-US" dirty="0">
-                <a:solidFill>
-                  <a:schemeClr val="accent1"/>
-                </a:solidFill>
-              </a:rPr>
-              <a:t>" 			</a:t>
-            </a:r>
-            <a:r>
-              <a:rPr lang="en-US" dirty="0" err="1">
-                <a:solidFill>
-                  <a:schemeClr val="accent1"/>
-                </a:solidFill>
-              </a:rPr>
-              <a:t>src</a:t>
-            </a:r>
-            <a:r>
-              <a:rPr lang="en-US" dirty="0">
-                <a:solidFill>
-                  <a:schemeClr val="accent1"/>
-                </a:solidFill>
-              </a:rPr>
-              <a:t>="#mars" rotation="0 0 0" &gt;</a:t>
-            </a:r>
-          </a:p>
-          <a:p>
-            <a:r>
-              <a:rPr lang="en-US" dirty="0">
-                <a:solidFill>
-                  <a:schemeClr val="accent1"/>
-                </a:solidFill>
-              </a:rPr>
-              <a:t>	&lt;/a-sphere&gt;</a:t>
-            </a:r>
-          </a:p>
-          <a:p>
-            <a:r>
-              <a:rPr lang="en-US" dirty="0"/>
-              <a:t>&lt;/</a:t>
-            </a:r>
-            <a:r>
-              <a:rPr lang="en-US" b="1" dirty="0"/>
-              <a:t>a-entity</a:t>
-            </a:r>
-            <a:r>
-              <a:rPr lang="en-US" dirty="0"/>
-              <a:t>&gt;</a:t>
-            </a:r>
           </a:p>
         </p:txBody>
       </p:sp>
@@ -6395,7 +7984,7 @@
 </p:sld>
 </file>
 
-<file path=ppt/slides/slide14.xml><?xml version="1.0" encoding="utf-8"?>
+<file path=ppt/slides/slide16.xml><?xml version="1.0" encoding="utf-8"?>
 <p:sld xmlns:a="http://schemas.openxmlformats.org/drawingml/2006/main" xmlns:r="http://schemas.openxmlformats.org/officeDocument/2006/relationships" xmlns:p="http://schemas.openxmlformats.org/presentationml/2006/main">
   <p:cSld>
     <p:spTree>
@@ -6568,7 +8157,7 @@
 </p:sld>
 </file>
 
-<file path=ppt/slides/slide15.xml><?xml version="1.0" encoding="utf-8"?>
+<file path=ppt/slides/slide17.xml><?xml version="1.0" encoding="utf-8"?>
 <p:sld xmlns:a="http://schemas.openxmlformats.org/drawingml/2006/main" xmlns:r="http://schemas.openxmlformats.org/officeDocument/2006/relationships" xmlns:p="http://schemas.openxmlformats.org/presentationml/2006/main">
   <p:cSld>
     <p:spTree>
@@ -6732,7 +8321,7 @@
 </p:sld>
 </file>
 
-<file path=ppt/slides/slide16.xml><?xml version="1.0" encoding="utf-8"?>
+<file path=ppt/slides/slide18.xml><?xml version="1.0" encoding="utf-8"?>
 <p:sld xmlns:a="http://schemas.openxmlformats.org/drawingml/2006/main" xmlns:r="http://schemas.openxmlformats.org/officeDocument/2006/relationships" xmlns:p="http://schemas.openxmlformats.org/presentationml/2006/main">
   <p:cSld>
     <p:spTree>
@@ -6999,7 +8588,7 @@
 </p:sld>
 </file>
 
-<file path=ppt/slides/slide17.xml><?xml version="1.0" encoding="utf-8"?>
+<file path=ppt/slides/slide19.xml><?xml version="1.0" encoding="utf-8"?>
 <p:sld xmlns:a="http://schemas.openxmlformats.org/drawingml/2006/main" xmlns:r="http://schemas.openxmlformats.org/officeDocument/2006/relationships" xmlns:p="http://schemas.openxmlformats.org/presentationml/2006/main">
   <p:cSld>
     <p:spTree>
